--- a/decks/hist-british-empire-india/hist-british-empire-india_ch4_raj-opposition.pptx
+++ b/decks/hist-british-empire-india/hist-british-empire-india_ch4_raj-opposition.pptx
@@ -127,30 +127,30 @@
   <p:extLst>
     <p:ext uri="{521415D9-36F7-43E2-AB2F-B90AF26B5E84}">
       <p14:sectionLst xmlns:p14="http://schemas.microsoft.com/office/powerpoint/2010/main">
-        <p14:section name="Opening" id="{debc6001-2a83-506f-407a-7354b189e3a6}">
+        <p14:section name="Opening" id="{485fdd99-1302-586c-11ac-524feff46d9c}">
           <p14:sldIdLst>
             <p14:sldId id="256"/>
           </p14:sldIdLst>
         </p14:section>
-        <p14:section name="Gate" id="{77ca82fe-a426-648a-538b-9ef5ff7b5d88}">
+        <p14:section name="Gate" id="{4122c798-5006-8510-ef31-b60ed899b9d5}">
           <p14:sldIdLst>
             <p14:sldId id="257"/>
             <p14:sldId id="258"/>
           </p14:sldIdLst>
         </p14:section>
-        <p14:section name="Pre-teach" id="{73a864cf-9fe9-2587-f7ec-68e00a26d794}">
+        <p14:section name="Pre-teach" id="{670203bb-c7f7-f779-e9db-8d8259f68648}">
           <p14:sldIdLst>
             <p14:sldId id="259"/>
             <p14:sldId id="260"/>
           </p14:sldIdLst>
         </p14:section>
-        <p14:section name="Read-along" id="{c790ec05-7154-45e1-dea9-bd26fd069efb}">
+        <p14:section name="Read-along" id="{206649a0-49b4-4693-e126-8d08078200e2}">
           <p14:sldIdLst>
             <p14:sldId id="261"/>
             <p14:sldId id="262"/>
           </p14:sldIdLst>
         </p14:section>
-        <p14:section name="Teach" id="{0acdd737-df70-17c5-0829-a2636c12f511}">
+        <p14:section name="Teach" id="{a53c87ca-5d4c-7faf-ad2f-c93d955f83ba}">
           <p14:sldIdLst>
             <p14:sldId id="263"/>
             <p14:sldId id="264"/>
@@ -160,7 +160,7 @@
             <p14:sldId id="268"/>
           </p14:sldIdLst>
         </p14:section>
-        <p14:section name="Routes" id="{243fa7a5-307f-f9c6-c646-5bf44c59d0c5}">
+        <p14:section name="Routes" id="{5c30c417-7a8e-a414-5c2a-57f3d5af97b2}">
           <p14:sldIdLst>
             <p14:sldId id="269"/>
             <p14:sldId id="270"/>
@@ -168,12 +168,12 @@
             <p14:sldId id="272"/>
           </p14:sldIdLst>
         </p14:section>
-        <p14:section name="Close" id="{cc11d1ff-5a6c-0772-a2eb-b82feab2e198}">
+        <p14:section name="Close" id="{c8b98227-c1b8-56a0-ddca-c19aa2397af7}">
           <p14:sldIdLst>
             <p14:sldId id="273"/>
           </p14:sldIdLst>
         </p14:section>
-        <p14:section name="Answers" id="{98509670-ae4d-f095-1032-effaf0e3dcbc}">
+        <p14:section name="Answers" id="{f5893c23-a427-3f59-b4d5-270db375ca44}">
           <p14:sldIdLst>
             <p14:sldId id="274"/>
             <p14:sldId id="275"/>
